--- a/book/soutenance.pptx
+++ b/book/soutenance.pptx
@@ -10134,7 +10134,7 @@
         <p:spPr>
           <a:xfrm>
             <a:off x="822960" y="1691640"/>
-            <a:ext cx="4754880" cy="548640"/>
+            <a:ext cx="4754880" cy="502920"/>
           </a:xfrm>
           <a:prstGeom prst="rect">
             <a:avLst/>
@@ -10150,7 +10150,7 @@
               <a:buNone/>
             </a:pPr>
             <a:r>
-              <a:rPr lang="en-US" sz="1500" dirty="0">
+              <a:rPr lang="en-US" sz="1400" dirty="0">
                 <a:solidFill>
                   <a:srgbClr val="111111"/>
                 </a:solidFill>
@@ -10160,7 +10160,7 @@
               </a:rPr>
               <a:t>cgo setup</a:t>
             </a:r>
-            <a:endParaRPr lang="en-US" sz="1500" dirty="0"/>
+            <a:endParaRPr lang="en-US" sz="1400" dirty="0"/>
           </a:p>
         </p:txBody>
       </p:sp>
@@ -10173,7 +10173,7 @@
         <p:spPr>
           <a:xfrm>
             <a:off x="5852160" y="1691640"/>
-            <a:ext cx="5669280" cy="548640"/>
+            <a:ext cx="5669280" cy="502920"/>
           </a:xfrm>
           <a:prstGeom prst="rect">
             <a:avLst/>
@@ -10189,7 +10189,7 @@
               <a:buNone/>
             </a:pPr>
             <a:r>
-              <a:rPr lang="en-US" sz="1500" dirty="0">
+              <a:rPr lang="en-US" sz="1400" dirty="0">
                 <a:solidFill>
                   <a:srgbClr val="3A3A3A"/>
                 </a:solidFill>
@@ -10199,7 +10199,7 @@
               </a:rPr>
               <a:t>assistant d'installation en sept étapes idempotentes</a:t>
             </a:r>
-            <a:endParaRPr lang="en-US" sz="1500" dirty="0"/>
+            <a:endParaRPr lang="en-US" sz="1400" dirty="0"/>
           </a:p>
         </p:txBody>
       </p:sp>
@@ -10211,8 +10211,8 @@
         </p:nvSpPr>
         <p:spPr>
           <a:xfrm>
-            <a:off x="822960" y="2350008"/>
-            <a:ext cx="4754880" cy="548640"/>
+            <a:off x="822960" y="2276856"/>
+            <a:ext cx="4754880" cy="502920"/>
           </a:xfrm>
           <a:prstGeom prst="rect">
             <a:avLst/>
@@ -10228,7 +10228,7 @@
               <a:buNone/>
             </a:pPr>
             <a:r>
-              <a:rPr lang="en-US" sz="1500" dirty="0">
+              <a:rPr lang="en-US" sz="1400" dirty="0">
                 <a:solidFill>
                   <a:srgbClr val="111111"/>
                 </a:solidFill>
@@ -10238,7 +10238,7 @@
               </a:rPr>
               <a:t>cgo kit ensure</a:t>
             </a:r>
-            <a:endParaRPr lang="en-US" sz="1500" dirty="0"/>
+            <a:endParaRPr lang="en-US" sz="1400" dirty="0"/>
           </a:p>
         </p:txBody>
       </p:sp>
@@ -10250,8 +10250,8 @@
         </p:nvSpPr>
         <p:spPr>
           <a:xfrm>
-            <a:off x="5852160" y="2350008"/>
-            <a:ext cx="5669280" cy="548640"/>
+            <a:off x="5852160" y="2276856"/>
+            <a:ext cx="5669280" cy="502920"/>
           </a:xfrm>
           <a:prstGeom prst="rect">
             <a:avLst/>
@@ -10267,7 +10267,7 @@
               <a:buNone/>
             </a:pPr>
             <a:r>
-              <a:rPr lang="en-US" sz="1500" dirty="0">
+              <a:rPr lang="en-US" sz="1400" dirty="0">
                 <a:solidFill>
                   <a:srgbClr val="3A3A3A"/>
                 </a:solidFill>
@@ -10277,7 +10277,7 @@
               </a:rPr>
               <a:t>garantit la machine virtuelle du banc et son état</a:t>
             </a:r>
-            <a:endParaRPr lang="en-US" sz="1500" dirty="0"/>
+            <a:endParaRPr lang="en-US" sz="1400" dirty="0"/>
           </a:p>
         </p:txBody>
       </p:sp>
@@ -10289,8 +10289,8 @@
         </p:nvSpPr>
         <p:spPr>
           <a:xfrm>
-            <a:off x="822960" y="3008376"/>
-            <a:ext cx="4754880" cy="548640"/>
+            <a:off x="822960" y="2862072"/>
+            <a:ext cx="4754880" cy="502920"/>
           </a:xfrm>
           <a:prstGeom prst="rect">
             <a:avLst/>
@@ -10306,7 +10306,7 @@
               <a:buNone/>
             </a:pPr>
             <a:r>
-              <a:rPr lang="en-US" sz="1500" dirty="0">
+              <a:rPr lang="en-US" sz="1400" dirty="0">
                 <a:solidFill>
                   <a:srgbClr val="111111"/>
                 </a:solidFill>
@@ -10314,9 +10314,9 @@
                 <a:ea typeface="Courier New" pitchFamily="34" charset="-122"/>
                 <a:cs typeface="Courier New" pitchFamily="34" charset="-120"/>
               </a:rPr>
-              <a:t>cgo run --profiles P2 --reps 1</a:t>
-            </a:r>
-            <a:endParaRPr lang="en-US" sz="1500" dirty="0"/>
+              <a:t>cgo kit snapshots</a:t>
+            </a:r>
+            <a:endParaRPr lang="en-US" sz="1400" dirty="0"/>
           </a:p>
         </p:txBody>
       </p:sp>
@@ -10328,8 +10328,8 @@
         </p:nvSpPr>
         <p:spPr>
           <a:xfrm>
-            <a:off x="5852160" y="3008376"/>
-            <a:ext cx="5669280" cy="548640"/>
+            <a:off x="5852160" y="2862072"/>
+            <a:ext cx="5669280" cy="502920"/>
           </a:xfrm>
           <a:prstGeom prst="rect">
             <a:avLst/>
@@ -10345,7 +10345,7 @@
               <a:buNone/>
             </a:pPr>
             <a:r>
-              <a:rPr lang="en-US" sz="1500" dirty="0">
+              <a:rPr lang="en-US" sz="1400" dirty="0">
                 <a:solidFill>
                   <a:srgbClr val="3A3A3A"/>
                 </a:solidFill>
@@ -10353,9 +10353,9 @@
                 <a:ea typeface="Arial" pitchFamily="34" charset="-122"/>
                 <a:cs typeface="Arial" pitchFamily="34" charset="-120"/>
               </a:rPr>
-              <a:t>campagne complète avec gel et résumé</a:t>
-            </a:r>
-            <a:endParaRPr lang="en-US" sz="1500" dirty="0"/>
+              <a:t>liste les instantanés ; revert y revient en une commande</a:t>
+            </a:r>
+            <a:endParaRPr lang="en-US" sz="1400" dirty="0"/>
           </a:p>
         </p:txBody>
       </p:sp>
@@ -10367,8 +10367,8 @@
         </p:nvSpPr>
         <p:spPr>
           <a:xfrm>
-            <a:off x="822960" y="3666744"/>
-            <a:ext cx="4754880" cy="548640"/>
+            <a:off x="822960" y="3447288"/>
+            <a:ext cx="4754880" cy="502920"/>
           </a:xfrm>
           <a:prstGeom prst="rect">
             <a:avLst/>
@@ -10384,7 +10384,7 @@
               <a:buNone/>
             </a:pPr>
             <a:r>
-              <a:rPr lang="en-US" sz="1500" dirty="0">
+              <a:rPr lang="en-US" sz="1400" dirty="0">
                 <a:solidFill>
                   <a:srgbClr val="111111"/>
                 </a:solidFill>
@@ -10392,9 +10392,9 @@
                 <a:ea typeface="Courier New" pitchFamily="34" charset="-122"/>
                 <a:cs typeface="Courier New" pitchFamily="34" charset="-120"/>
               </a:rPr>
-              <a:t>cgo audit</a:t>
-            </a:r>
-            <a:endParaRPr lang="en-US" sz="1500" dirty="0"/>
+              <a:t>cgo run --profiles P2 --reps 1</a:t>
+            </a:r>
+            <a:endParaRPr lang="en-US" sz="1400" dirty="0"/>
           </a:p>
         </p:txBody>
       </p:sp>
@@ -10406,8 +10406,8 @@
         </p:nvSpPr>
         <p:spPr>
           <a:xfrm>
-            <a:off x="5852160" y="3666744"/>
-            <a:ext cx="5669280" cy="548640"/>
+            <a:off x="5852160" y="3447288"/>
+            <a:ext cx="5669280" cy="502920"/>
           </a:xfrm>
           <a:prstGeom prst="rect">
             <a:avLst/>
@@ -10423,7 +10423,7 @@
               <a:buNone/>
             </a:pPr>
             <a:r>
-              <a:rPr lang="en-US" sz="1500" dirty="0">
+              <a:rPr lang="en-US" sz="1400" dirty="0">
                 <a:solidFill>
                   <a:srgbClr val="3A3A3A"/>
                 </a:solidFill>
@@ -10431,9 +10431,9 @@
                 <a:ea typeface="Arial" pitchFamily="34" charset="-122"/>
                 <a:cs typeface="Arial" pitchFamily="34" charset="-120"/>
               </a:rPr>
-              <a:t>mesure le lien réel accessible depuis le poste</a:t>
-            </a:r>
-            <a:endParaRPr lang="en-US" sz="1500" dirty="0"/>
+              <a:t>campagne complète avec gel et résumé</a:t>
+            </a:r>
+            <a:endParaRPr lang="en-US" sz="1400" dirty="0"/>
           </a:p>
         </p:txBody>
       </p:sp>
@@ -10445,8 +10445,8 @@
         </p:nvSpPr>
         <p:spPr>
           <a:xfrm>
-            <a:off x="822960" y="4325112"/>
-            <a:ext cx="4754880" cy="548640"/>
+            <a:off x="822960" y="4032504"/>
+            <a:ext cx="4754880" cy="502920"/>
           </a:xfrm>
           <a:prstGeom prst="rect">
             <a:avLst/>
@@ -10462,7 +10462,7 @@
               <a:buNone/>
             </a:pPr>
             <a:r>
-              <a:rPr lang="en-US" sz="1500" dirty="0">
+              <a:rPr lang="en-US" sz="1400" dirty="0">
                 <a:solidFill>
                   <a:srgbClr val="111111"/>
                 </a:solidFill>
@@ -10470,9 +10470,9 @@
                 <a:ea typeface="Courier New" pitchFamily="34" charset="-122"/>
                 <a:cs typeface="Courier New" pitchFamily="34" charset="-120"/>
               </a:rPr>
-              <a:t>cgo verify</a:t>
-            </a:r>
-            <a:endParaRPr lang="en-US" sz="1500" dirty="0"/>
+              <a:t>cgo audit</a:t>
+            </a:r>
+            <a:endParaRPr lang="en-US" sz="1400" dirty="0"/>
           </a:p>
         </p:txBody>
       </p:sp>
@@ -10484,8 +10484,8 @@
         </p:nvSpPr>
         <p:spPr>
           <a:xfrm>
-            <a:off x="5852160" y="4325112"/>
-            <a:ext cx="5669280" cy="548640"/>
+            <a:off x="5852160" y="4032504"/>
+            <a:ext cx="5669280" cy="502920"/>
           </a:xfrm>
           <a:prstGeom prst="rect">
             <a:avLst/>
@@ -10501,7 +10501,7 @@
               <a:buNone/>
             </a:pPr>
             <a:r>
-              <a:rPr lang="en-US" sz="1500" dirty="0">
+              <a:rPr lang="en-US" sz="1400" dirty="0">
                 <a:solidFill>
                   <a:srgbClr val="3A3A3A"/>
                 </a:solidFill>
@@ -10509,9 +10509,9 @@
                 <a:ea typeface="Arial" pitchFamily="34" charset="-122"/>
                 <a:cs typeface="Arial" pitchFamily="34" charset="-120"/>
               </a:rPr>
-              <a:t>recalcule les empreintes SHA-256 du gel</a:t>
-            </a:r>
-            <a:endParaRPr lang="en-US" sz="1500" dirty="0"/>
+              <a:t>mesure le lien réel accessible depuis le poste</a:t>
+            </a:r>
+            <a:endParaRPr lang="en-US" sz="1400" dirty="0"/>
           </a:p>
         </p:txBody>
       </p:sp>
@@ -10523,8 +10523,8 @@
         </p:nvSpPr>
         <p:spPr>
           <a:xfrm>
-            <a:off x="822960" y="4983480"/>
-            <a:ext cx="4754880" cy="548640"/>
+            <a:off x="822960" y="4617720"/>
+            <a:ext cx="4754880" cy="502920"/>
           </a:xfrm>
           <a:prstGeom prst="rect">
             <a:avLst/>
@@ -10540,7 +10540,7 @@
               <a:buNone/>
             </a:pPr>
             <a:r>
-              <a:rPr lang="en-US" sz="1500" dirty="0">
+              <a:rPr lang="en-US" sz="1400" dirty="0">
                 <a:solidFill>
                   <a:srgbClr val="111111"/>
                 </a:solidFill>
@@ -10548,9 +10548,9 @@
                 <a:ea typeface="Courier New" pitchFamily="34" charset="-122"/>
                 <a:cs typeface="Courier New" pitchFamily="34" charset="-120"/>
               </a:rPr>
-              <a:t>cgo figures</a:t>
-            </a:r>
-            <a:endParaRPr lang="en-US" sz="1500" dirty="0"/>
+              <a:t>cgo kit verify</a:t>
+            </a:r>
+            <a:endParaRPr lang="en-US" sz="1400" dirty="0"/>
           </a:p>
         </p:txBody>
       </p:sp>
@@ -10562,8 +10562,8 @@
         </p:nvSpPr>
         <p:spPr>
           <a:xfrm>
-            <a:off x="5852160" y="4983480"/>
-            <a:ext cx="5669280" cy="548640"/>
+            <a:off x="5852160" y="4617720"/>
+            <a:ext cx="5669280" cy="502920"/>
           </a:xfrm>
           <a:prstGeom prst="rect">
             <a:avLst/>
@@ -10579,7 +10579,7 @@
               <a:buNone/>
             </a:pPr>
             <a:r>
-              <a:rPr lang="en-US" sz="1500" dirty="0">
+              <a:rPr lang="en-US" sz="1400" dirty="0">
                 <a:solidFill>
                   <a:srgbClr val="3A3A3A"/>
                 </a:solidFill>
@@ -10587,9 +10587,9 @@
                 <a:ea typeface="Arial" pitchFamily="34" charset="-122"/>
                 <a:cs typeface="Arial" pitchFamily="34" charset="-120"/>
               </a:rPr>
-              <a:t>régénère les figures depuis les archives</a:t>
-            </a:r>
-            <a:endParaRPr lang="en-US" sz="1500" dirty="0"/>
+              <a:t>recalcule les empreintes des archives sur la VM</a:t>
+            </a:r>
+            <a:endParaRPr lang="en-US" sz="1400" dirty="0"/>
           </a:p>
         </p:txBody>
       </p:sp>
@@ -10601,8 +10601,8 @@
         </p:nvSpPr>
         <p:spPr>
           <a:xfrm>
-            <a:off x="822960" y="5641848"/>
-            <a:ext cx="4754880" cy="548640"/>
+            <a:off x="822960" y="5202936"/>
+            <a:ext cx="4754880" cy="502920"/>
           </a:xfrm>
           <a:prstGeom prst="rect">
             <a:avLst/>
@@ -10618,7 +10618,7 @@
               <a:buNone/>
             </a:pPr>
             <a:r>
-              <a:rPr lang="en-US" sz="1500" dirty="0">
+              <a:rPr lang="en-US" sz="1400" dirty="0">
                 <a:solidFill>
                   <a:srgbClr val="111111"/>
                 </a:solidFill>
@@ -10626,22 +10626,100 @@
                 <a:ea typeface="Courier New" pitchFamily="34" charset="-122"/>
                 <a:cs typeface="Courier New" pitchFamily="34" charset="-120"/>
               </a:rPr>
+              <a:t>cgo figures</a:t>
+            </a:r>
+            <a:endParaRPr lang="en-US" sz="1400" dirty="0"/>
+          </a:p>
+        </p:txBody>
+      </p:sp>
+      <p:sp>
+        <p:nvSpPr>
+          <p:cNvPr id="18" name="Text 16"/>
+          <p:cNvSpPr/>
+          <p:nvPr/>
+        </p:nvSpPr>
+        <p:spPr>
+          <a:xfrm>
+            <a:off x="5852160" y="5202936"/>
+            <a:ext cx="5669280" cy="502920"/>
+          </a:xfrm>
+          <a:prstGeom prst="rect">
+            <a:avLst/>
+          </a:prstGeom>
+          <a:noFill/>
+          <a:ln/>
+        </p:spPr>
+        <p:txBody>
+          <a:bodyPr wrap="square" lIns="0" tIns="0" rIns="0" bIns="0" rtlCol="0" anchor="t"/>
+          <a:lstStyle/>
+          <a:p>
+            <a:pPr indent="0" marL="0">
+              <a:buNone/>
+            </a:pPr>
+            <a:r>
+              <a:rPr lang="en-US" sz="1400" dirty="0">
+                <a:solidFill>
+                  <a:srgbClr val="3A3A3A"/>
+                </a:solidFill>
+                <a:latin typeface="Arial" pitchFamily="34" charset="0"/>
+                <a:ea typeface="Arial" pitchFamily="34" charset="-122"/>
+                <a:cs typeface="Arial" pitchFamily="34" charset="-120"/>
+              </a:rPr>
+              <a:t>régénère les figures depuis les archives</a:t>
+            </a:r>
+            <a:endParaRPr lang="en-US" sz="1400" dirty="0"/>
+          </a:p>
+        </p:txBody>
+      </p:sp>
+      <p:sp>
+        <p:nvSpPr>
+          <p:cNvPr id="19" name="Text 17"/>
+          <p:cNvSpPr/>
+          <p:nvPr/>
+        </p:nvSpPr>
+        <p:spPr>
+          <a:xfrm>
+            <a:off x="822960" y="5788152"/>
+            <a:ext cx="4754880" cy="502920"/>
+          </a:xfrm>
+          <a:prstGeom prst="rect">
+            <a:avLst/>
+          </a:prstGeom>
+          <a:noFill/>
+          <a:ln/>
+        </p:spPr>
+        <p:txBody>
+          <a:bodyPr wrap="square" lIns="0" tIns="0" rIns="0" bIns="0" rtlCol="0" anchor="t"/>
+          <a:lstStyle/>
+          <a:p>
+            <a:pPr indent="0" marL="0">
+              <a:buNone/>
+            </a:pPr>
+            <a:r>
+              <a:rPr lang="en-US" sz="1400" dirty="0">
+                <a:solidFill>
+                  <a:srgbClr val="111111"/>
+                </a:solidFill>
+                <a:latin typeface="Courier New" pitchFamily="34" charset="0"/>
+                <a:ea typeface="Courier New" pitchFamily="34" charset="-122"/>
+                <a:cs typeface="Courier New" pitchFamily="34" charset="-120"/>
+              </a:rPr>
               <a:t>cgo tui</a:t>
             </a:r>
-            <a:endParaRPr lang="en-US" sz="1500" dirty="0"/>
-          </a:p>
-        </p:txBody>
-      </p:sp>
-      <p:sp>
-        <p:nvSpPr>
-          <p:cNvPr id="18" name="Text 16"/>
-          <p:cNvSpPr/>
-          <p:nvPr/>
-        </p:nvSpPr>
-        <p:spPr>
-          <a:xfrm>
-            <a:off x="5852160" y="5641848"/>
-            <a:ext cx="5669280" cy="548640"/>
+            <a:endParaRPr lang="en-US" sz="1400" dirty="0"/>
+          </a:p>
+        </p:txBody>
+      </p:sp>
+      <p:sp>
+        <p:nvSpPr>
+          <p:cNvPr id="20" name="Text 18"/>
+          <p:cNvSpPr/>
+          <p:nvPr/>
+        </p:nvSpPr>
+        <p:spPr>
+          <a:xfrm>
+            <a:off x="5852160" y="5788152"/>
+            <a:ext cx="5669280" cy="502920"/>
           </a:xfrm>
           <a:prstGeom prst="rect">
             <a:avLst/>
@@ -10657,7 +10735,7 @@
               <a:buNone/>
             </a:pPr>
             <a:r>
-              <a:rPr lang="en-US" sz="1500" dirty="0">
+              <a:rPr lang="en-US" sz="1400" dirty="0">
                 <a:solidFill>
                   <a:srgbClr val="3A3A3A"/>
                 </a:solidFill>
@@ -10667,7 +10745,7 @@
               </a:rPr>
               <a:t>tableau de bord terminal en cinq onglets</a:t>
             </a:r>
-            <a:endParaRPr lang="en-US" sz="1500" dirty="0"/>
+            <a:endParaRPr lang="en-US" sz="1400" dirty="0"/>
           </a:p>
         </p:txBody>
       </p:sp>

--- a/book/soutenance.pptx
+++ b/book/soutenance.pptx
@@ -2551,7 +2551,7 @@
           <a:p>
             <a:r>
               <a:rPr lang="en-US" dirty="0"/>
-              <a:t>L'outil tient dans un seul binaire : il se copie, il se lance, tout est dedans. Treize virgule sept mégaoctets mesurés. Chaque mesure est gelée avec son empreinte SHA-256 : n'importe quel lecteur peut vérifier que les fichiers n'ont pas bougé. Et le banc survit aux coupures de courant.</a:t>
+              <a:t>L'outil tient dans un seul binaire : il se copie, il se lance, tout est dedans. Chaque mesure est gelée avec son empreinte SHA-256 : n'importe quel lecteur peut vérifier que les fichiers n'ont pas bougé. Et le banc survit aux coupures de courant.</a:t>
             </a:r>
             <a:endParaRPr lang="en-US" dirty="0"/>
           </a:p>
@@ -16278,7 +16278,7 @@
                 <a:ea typeface="Arial" pitchFamily="34" charset="-122"/>
                 <a:cs typeface="Arial" pitchFamily="34" charset="-120"/>
               </a:rPr>
-              <a:t>13,7 Mo</a:t>
+              <a:t>1 fichier</a:t>
             </a:r>
             <a:endParaRPr lang="en-US" sz="4200" dirty="0"/>
           </a:p>
@@ -16320,7 +16320,7 @@
                 <a:ea typeface="Arial" pitchFamily="34" charset="-122"/>
                 <a:cs typeface="Arial" pitchFamily="34" charset="-120"/>
               </a:rPr>
-              <a:t>BINAIRE STATIQUE MESURÉ, FRONTEND WEB EMBARQUÉ</a:t>
+              <a:t>BINAIRE STATIQUE, FRONTEND WEB EMBARQUÉ</a:t>
             </a:r>
             <a:endParaRPr lang="en-US" sz="1250" dirty="0"/>
           </a:p>
@@ -16359,7 +16359,7 @@
                 <a:ea typeface="Arial" pitchFamily="34" charset="-122"/>
                 <a:cs typeface="Arial" pitchFamily="34" charset="-120"/>
               </a:rPr>
-              <a:t>4 Go</a:t>
+              <a:t>Serveur réel</a:t>
             </a:r>
             <a:endParaRPr lang="en-US" sz="4200" dirty="0"/>
           </a:p>
@@ -16401,7 +16401,7 @@
                 <a:ea typeface="Arial" pitchFamily="34" charset="-122"/>
                 <a:cs typeface="Arial" pitchFamily="34" charset="-120"/>
               </a:rPr>
-              <a:t>SERVEUR DU BANC : UBUNTU SERVER 24.04 LTS</a:t>
+              <a:t>MACHINE PHYSIQUE MÉTÉO MADAGASCAR : UBUNTU SERVER</a:t>
             </a:r>
             <a:endParaRPr lang="en-US" sz="1250" dirty="0"/>
           </a:p>
